--- a/docs/project-guide/cen429-proje-rehberi-sunum.tr.pptx
+++ b/docs/project-guide/cen429-proje-rehberi-sunum.tr.pptx
@@ -6784,7 +6784,7 @@
                   <a:srgbClr val="1F2D3A"/>
                 </a:solidFill>
               </a:rPr>
-              <a:t>Seçiminizi Microsoft Teams'teki </a:t>
+              <a:t>Seçiminizi paylaşılan </a:t>
             </a:r>
             <a:r>
               <a:rPr sz="2000" b="1">
@@ -6792,7 +6792,7 @@
                   <a:srgbClr val="1F2D3A"/>
                 </a:solidFill>
               </a:rPr>
-              <a:t>takım ve konu tablosuna</a:t>
+              <a:t>takım ve konu listesine</a:t>
             </a:r>
             <a:r>
               <a:rPr sz="2000" b="0">
@@ -6800,7 +6800,7 @@
                   <a:srgbClr val="1F2D3A"/>
                 </a:solidFill>
               </a:rPr>
-              <a:t> yazın — </a:t>
+              <a:t> yazın (bağlantı Teams duyurusunda) — </a:t>
             </a:r>
             <a:r>
               <a:rPr sz="2000" b="1">
@@ -11490,7 +11490,7 @@
                   <a:srgbClr val="1F2D3A"/>
                 </a:solidFill>
               </a:rPr>
-              <a:t> en çok 3 kişi (tek başınıza da olur); bir konuyu yalnız bir takım alır; 3. haftadan</a:t>
+              <a:t> en çok 5 kişi (tek başınıza da olur); bir konuyu yalnız bir takım alır; 3. haftadan</a:t>
             </a:r>
           </a:p>
         </p:txBody>
@@ -22519,7 +22519,7 @@
                   <a:srgbClr val="1F2D3A"/>
                 </a:solidFill>
               </a:rPr>
-              <a:t> Evet. Takım en çok 3 kişidir; takımlar 3. haftanın sonunda (04.10.2026) kesinleşir.</a:t>
+              <a:t> Evet. Takım en çok 5 kişidir; takımlar 3. haftanın sonunda (04.10.2026) kesinleşir.</a:t>
             </a:r>
           </a:p>
         </p:txBody>

--- a/docs/project-guide/cen429-proje-rehberi-sunum.tr.pptx
+++ b/docs/project-guide/cen429-proje-rehberi-sunum.tr.pptx
@@ -4745,7 +4745,7 @@
                 </a:solidFill>
                 <a:latin typeface="Consolas"/>
               </a:rPr>
-              <a:t>cen429-proje-ad-soyad-cpp</a:t>
+              <a:t>cen429-2026-2027-NNN-ad-soyad-cpp</a:t>
             </a:r>
             <a:r>
               <a:rPr sz="2000" b="0">
@@ -15416,7 +15416,7 @@
                 </a:solidFill>
                 <a:latin typeface="Consolas"/>
               </a:rPr>
-              <a:t>cen429-vize-ad-soyad.zip                  # final: cen429-final-ad-soyad.zip</a:t>
+              <a:t>cen429-2026-2027-NNN-midterm.zip                  # final: cen429-2026-2027-NNN-final.zip</a:t>
             </a:r>
           </a:p>
           <a:p>
@@ -15428,7 +15428,7 @@
                 </a:solidFill>
                 <a:latin typeface="Consolas"/>
               </a:rPr>
-              <a:t>└── cen429-proje-ad-soyad-cpp/            # GitHub deposunun klonu</a:t>
+              <a:t>└── cen429-2026-2027-NNN-ad-soyad-cpp/            # GitHub deposunun klonu</a:t>
             </a:r>
           </a:p>
           <a:p>
@@ -15762,7 +15762,7 @@
                 </a:solidFill>
                 <a:latin typeface="Consolas"/>
               </a:rPr>
-              <a:t>cen429-proje-ad-soyad-cpp</a:t>
+              <a:t>cen429-2026-2027-NNN-ad-soyad-cpp</a:t>
             </a:r>
           </a:p>
           <a:p>
@@ -15802,7 +15802,7 @@
                 </a:solidFill>
                 <a:latin typeface="Consolas"/>
               </a:rPr>
-              <a:t>cen429-vize-ad-soyad.zip</a:t>
+              <a:t>cen429-2026-2027-NNN-midterm.zip</a:t>
             </a:r>
             <a:r>
               <a:rPr sz="2000" b="0">
@@ -15819,7 +15819,7 @@
                 </a:solidFill>
                 <a:latin typeface="Consolas"/>
               </a:rPr>
-              <a:t>cen429-final-ad-soyad.zip</a:t>
+              <a:t>cen429-2026-2027-NNN-final.zip</a:t>
             </a:r>
           </a:p>
           <a:p>
@@ -15859,7 +15859,7 @@
                 </a:solidFill>
                 <a:latin typeface="Consolas"/>
               </a:rPr>
-              <a:t>cen429-guvenlik-kilavuzu-ad-soyad.docx</a:t>
+              <a:t>cen429-2026-2027-NNN-security-guide.docx</a:t>
             </a:r>
           </a:p>
         </p:txBody>
